--- a/lessons-v2/day11/day11.pptx
+++ b/lessons-v2/day11/day11.pptx
@@ -22,9 +22,10 @@
     <p:sldId id="270" r:id="rId16"/>
     <p:sldId id="271" r:id="rId17"/>
     <p:sldId id="272" r:id="rId18"/>
+    <p:sldId id="273" r:id="rId19"/>
   </p:sldIdLst>
   <p:notesMasterIdLst>
-    <p:notesMasterId r:id="rId19"/>
+    <p:notesMasterId r:id="rId20"/>
   </p:notesMasterIdLst>
   <p:sldSz cx="12192000" cy="6858000"/>
   <p:notesSz cx="6858000" cy="12192000"/>
@@ -625,6 +626,96 @@
           <a:p>
             <a:r>
               <a:rPr lang="en-US" dirty="0"/>
+              <a:t>4 min. HIBP is Troy Hunt's breach-aggregation service — safe, reputable, no password entry.
+Most students will have 2-10 hits. Make the action concrete: the reused ones are the danger.
+CUT this DO first if short — but it lands hard, try to keep it.</a:t>
+            </a:r>
+            <a:endParaRPr lang="en-US" dirty="0"/>
+          </a:p>
+        </p:txBody>
+      </p:sp>
+      <p:sp>
+        <p:nvSpPr>
+          <p:cNvPr id="4" name="Slide Number Placeholder 3"/>
+          <p:cNvSpPr>
+            <a:spLocks noGrp="1"/>
+          </p:cNvSpPr>
+          <p:nvPr>
+            <p:ph type="sldNum" sz="quarter" idx="10"/>
+          </p:nvPr>
+        </p:nvSpPr>
+        <p:spPr/>
+        <p:txBody>
+          <a:bodyPr/>
+          <a:lstStyle/>
+          <a:p>
+            <a:fld id="{F7021451-1387-4CA6-816F-3879F97B5CBC}" type="slidenum">
+              <a:rPr lang="en-US"/>
+              <a:t>10</a:t>
+            </a:fld>
+            <a:endParaRPr lang="en-US"/>
+          </a:p>
+        </p:txBody>
+      </p:sp>
+    </p:spTree>
+    <p:extLst>
+      <p:ext uri="{BB962C8B-B14F-4D97-AF65-F5344CB8AC3E}">
+        <p14:creationId xmlns:p14="http://schemas.microsoft.com/office/powerpoint/2010/main" val="1024086991"/>
+      </p:ext>
+    </p:extLst>
+  </p:cSld>
+  <p:clrMapOvr>
+    <a:masterClrMapping/>
+  </p:clrMapOvr>
+</p:notes>
+</file>
+
+<file path=ppt/notesSlides/notesSlide11.xml><?xml version="1.0" encoding="utf-8"?>
+<p:notes xmlns:a="http://schemas.openxmlformats.org/drawingml/2006/main" xmlns:r="http://schemas.openxmlformats.org/officeDocument/2006/relationships" xmlns:p="http://schemas.openxmlformats.org/presentationml/2006/main">
+  <p:cSld>
+    <p:spTree>
+      <p:nvGrpSpPr>
+        <p:cNvPr id="1" name=""/>
+        <p:cNvGrpSpPr/>
+        <p:nvPr/>
+      </p:nvGrpSpPr>
+      <p:grpSpPr>
+        <a:xfrm>
+          <a:off x="0" y="0"/>
+          <a:ext cx="0" cy="0"/>
+          <a:chOff x="0" y="0"/>
+          <a:chExt cx="0" cy="0"/>
+        </a:xfrm>
+      </p:grpSpPr>
+      <p:sp>
+        <p:nvSpPr>
+          <p:cNvPr id="2" name="Slide Image Placeholder 1"/>
+          <p:cNvSpPr>
+            <a:spLocks noGrp="1" noRot="1" noChangeAspect="1"/>
+          </p:cNvSpPr>
+          <p:nvPr>
+            <p:ph type="sldImg"/>
+          </p:nvPr>
+        </p:nvSpPr>
+        <p:spPr/>
+      </p:sp>
+      <p:sp>
+        <p:nvSpPr>
+          <p:cNvPr id="3" name="Notes Placeholder 2"/>
+          <p:cNvSpPr>
+            <a:spLocks noGrp="1"/>
+          </p:cNvSpPr>
+          <p:nvPr>
+            <p:ph type="body" idx="1"/>
+          </p:nvPr>
+        </p:nvSpPr>
+        <p:spPr/>
+        <p:txBody>
+          <a:bodyPr/>
+          <a:lstStyle/>
+          <a:p>
+            <a:r>
+              <a:rPr lang="en-US" dirty="0"/>
               <a:t>The Day 11 TRAP: "malware = virus". Virus is one small category. Modern crime is ransomware +
 infostealers + RATs. Separate DELIVERY (phishing/exploit/supply chain) from PAYLOAD (this
 table) — a phish can deliver any of these.</a:t>
@@ -650,7 +741,7 @@
           <a:p>
             <a:fld id="{F7021451-1387-4CA6-816F-3879F97B5CBC}" type="slidenum">
               <a:rPr lang="en-US"/>
-              <a:t>10</a:t>
+              <a:t>11</a:t>
             </a:fld>
             <a:endParaRPr lang="en-US"/>
           </a:p>
@@ -669,7 +760,7 @@
 </p:notes>
 </file>
 
-<file path=ppt/notesSlides/notesSlide11.xml><?xml version="1.0" encoding="utf-8"?>
+<file path=ppt/notesSlides/notesSlide12.xml><?xml version="1.0" encoding="utf-8"?>
 <p:notes xmlns:a="http://schemas.openxmlformats.org/drawingml/2006/main" xmlns:r="http://schemas.openxmlformats.org/officeDocument/2006/relationships" xmlns:p="http://schemas.openxmlformats.org/presentationml/2006/main">
   <p:cSld>
     <p:spTree>
@@ -740,7 +831,7 @@
           <a:p>
             <a:fld id="{F7021451-1387-4CA6-816F-3879F97B5CBC}" type="slidenum">
               <a:rPr lang="en-US"/>
-              <a:t>11</a:t>
+              <a:t>12</a:t>
             </a:fld>
             <a:endParaRPr lang="en-US"/>
           </a:p>
@@ -759,7 +850,7 @@
 </p:notes>
 </file>
 
-<file path=ppt/notesSlides/notesSlide12.xml><?xml version="1.0" encoding="utf-8"?>
+<file path=ppt/notesSlides/notesSlide13.xml><?xml version="1.0" encoding="utf-8"?>
 <p:notes xmlns:a="http://schemas.openxmlformats.org/drawingml/2006/main" xmlns:r="http://schemas.openxmlformats.org/officeDocument/2006/relationships" xmlns:p="http://schemas.openxmlformats.org/presentationml/2006/main">
   <p:cSld>
     <p:spTree>
@@ -829,7 +920,7 @@
           <a:p>
             <a:fld id="{F7021451-1387-4CA6-816F-3879F97B5CBC}" type="slidenum">
               <a:rPr lang="en-US"/>
-              <a:t>12</a:t>
+              <a:t>13</a:t>
             </a:fld>
             <a:endParaRPr lang="en-US"/>
           </a:p>
@@ -848,7 +939,7 @@
 </p:notes>
 </file>
 
-<file path=ppt/notesSlides/notesSlide13.xml><?xml version="1.0" encoding="utf-8"?>
+<file path=ppt/notesSlides/notesSlide14.xml><?xml version="1.0" encoding="utf-8"?>
 <p:notes xmlns:a="http://schemas.openxmlformats.org/drawingml/2006/main" xmlns:r="http://schemas.openxmlformats.org/officeDocument/2006/relationships" xmlns:p="http://schemas.openxmlformats.org/presentationml/2006/main">
   <p:cSld>
     <p:spTree>
@@ -918,7 +1009,7 @@
           <a:p>
             <a:fld id="{F7021451-1387-4CA6-816F-3879F97B5CBC}" type="slidenum">
               <a:rPr lang="en-US"/>
-              <a:t>13</a:t>
+              <a:t>14</a:t>
             </a:fld>
             <a:endParaRPr lang="en-US"/>
           </a:p>
@@ -937,7 +1028,7 @@
 </p:notes>
 </file>
 
-<file path=ppt/notesSlides/notesSlide14.xml><?xml version="1.0" encoding="utf-8"?>
+<file path=ppt/notesSlides/notesSlide15.xml><?xml version="1.0" encoding="utf-8"?>
 <p:notes xmlns:a="http://schemas.openxmlformats.org/drawingml/2006/main" xmlns:r="http://schemas.openxmlformats.org/officeDocument/2006/relationships" xmlns:p="http://schemas.openxmlformats.org/presentationml/2006/main">
   <p:cSld>
     <p:spTree>
@@ -1008,7 +1099,7 @@
           <a:p>
             <a:fld id="{F7021451-1387-4CA6-816F-3879F97B5CBC}" type="slidenum">
               <a:rPr lang="en-US"/>
-              <a:t>14</a:t>
+              <a:t>15</a:t>
             </a:fld>
             <a:endParaRPr lang="en-US"/>
           </a:p>
@@ -1027,7 +1118,7 @@
 </p:notes>
 </file>
 
-<file path=ppt/notesSlides/notesSlide15.xml><?xml version="1.0" encoding="utf-8"?>
+<file path=ppt/notesSlides/notesSlide16.xml><?xml version="1.0" encoding="utf-8"?>
 <p:notes xmlns:a="http://schemas.openxmlformats.org/drawingml/2006/main" xmlns:r="http://schemas.openxmlformats.org/officeDocument/2006/relationships" xmlns:p="http://schemas.openxmlformats.org/presentationml/2006/main">
   <p:cSld>
     <p:spTree>
@@ -1096,7 +1187,7 @@
           <a:p>
             <a:fld id="{F7021451-1387-4CA6-816F-3879F97B5CBC}" type="slidenum">
               <a:rPr lang="en-US"/>
-              <a:t>15</a:t>
+              <a:t>16</a:t>
             </a:fld>
             <a:endParaRPr lang="en-US"/>
           </a:p>
@@ -1115,7 +1206,7 @@
 </p:notes>
 </file>
 
-<file path=ppt/notesSlides/notesSlide16.xml><?xml version="1.0" encoding="utf-8"?>
+<file path=ppt/notesSlides/notesSlide17.xml><?xml version="1.0" encoding="utf-8"?>
 <p:notes xmlns:a="http://schemas.openxmlformats.org/drawingml/2006/main" xmlns:r="http://schemas.openxmlformats.org/officeDocument/2006/relationships" xmlns:p="http://schemas.openxmlformats.org/presentationml/2006/main">
   <p:cSld>
     <p:spTree>
@@ -1184,7 +1275,7 @@
           <a:p>
             <a:fld id="{F7021451-1387-4CA6-816F-3879F97B5CBC}" type="slidenum">
               <a:rPr lang="en-US"/>
-              <a:t>16</a:t>
+              <a:t>17</a:t>
             </a:fld>
             <a:endParaRPr lang="en-US"/>
           </a:p>
@@ -1203,7 +1294,7 @@
 </p:notes>
 </file>
 
-<file path=ppt/notesSlides/notesSlide17.xml><?xml version="1.0" encoding="utf-8"?>
+<file path=ppt/notesSlides/notesSlide18.xml><?xml version="1.0" encoding="utf-8"?>
 <p:notes xmlns:a="http://schemas.openxmlformats.org/drawingml/2006/main" xmlns:r="http://schemas.openxmlformats.org/officeDocument/2006/relationships" xmlns:p="http://schemas.openxmlformats.org/presentationml/2006/main">
   <p:cSld>
     <p:spTree>
@@ -1273,7 +1364,7 @@
           <a:p>
             <a:fld id="{F7021451-1387-4CA6-816F-3879F97B5CBC}" type="slidenum">
               <a:rPr lang="en-US"/>
-              <a:t>17</a:t>
+              <a:t>18</a:t>
             </a:fld>
             <a:endParaRPr lang="en-US"/>
           </a:p>
@@ -1695,8 +1786,7 @@
           <a:p>
             <a:r>
               <a:rPr lang="en-US" dirty="0"/>
-              <a:t>MFA is the single highest-value control here — it breaks step 4. SPF/DKIM/DMARC are the email
-authentication stack that makes sender spoofing harder (name them; Day 19 goes deeper).</a:t>
+              <a:t>MFA is the single highest-value control here — it breaks step 4.</a:t>
             </a:r>
             <a:endParaRPr lang="en-US" dirty="0"/>
           </a:p>
@@ -1739,6 +1829,98 @@
 </file>
 
 <file path=ppt/notesSlides/notesSlide7.xml><?xml version="1.0" encoding="utf-8"?>
+<p:notes xmlns:a="http://schemas.openxmlformats.org/drawingml/2006/main" xmlns:r="http://schemas.openxmlformats.org/officeDocument/2006/relationships" xmlns:p="http://schemas.openxmlformats.org/presentationml/2006/main">
+  <p:cSld>
+    <p:spTree>
+      <p:nvGrpSpPr>
+        <p:cNvPr id="1" name=""/>
+        <p:cNvGrpSpPr/>
+        <p:nvPr/>
+      </p:nvGrpSpPr>
+      <p:grpSpPr>
+        <a:xfrm>
+          <a:off x="0" y="0"/>
+          <a:ext cx="0" cy="0"/>
+          <a:chOff x="0" y="0"/>
+          <a:chExt cx="0" cy="0"/>
+        </a:xfrm>
+      </p:grpSpPr>
+      <p:sp>
+        <p:nvSpPr>
+          <p:cNvPr id="2" name="Slide Image Placeholder 1"/>
+          <p:cNvSpPr>
+            <a:spLocks noGrp="1" noRot="1" noChangeAspect="1"/>
+          </p:cNvSpPr>
+          <p:nvPr>
+            <p:ph type="sldImg"/>
+          </p:nvPr>
+        </p:nvSpPr>
+        <p:spPr/>
+      </p:sp>
+      <p:sp>
+        <p:nvSpPr>
+          <p:cNvPr id="3" name="Notes Placeholder 2"/>
+          <p:cNvSpPr>
+            <a:spLocks noGrp="1"/>
+          </p:cNvSpPr>
+          <p:nvPr>
+            <p:ph type="body" idx="1"/>
+          </p:nvPr>
+        </p:nvSpPr>
+        <p:spPr/>
+        <p:txBody>
+          <a:bodyPr/>
+          <a:lstStyle/>
+          <a:p>
+            <a:r>
+              <a:rPr lang="en-US" dirty="0"/>
+              <a:t>Reading a header: `Received:` chain shows the real path; `Authentication-Results:` shows
+spf=pass/fail, dkim=pass/fail, dmarc=pass/fail. The Day-11 phish dissection asset asks about
+exactly these fields. Most SOC L1 work is triaging reported phish — this is the check they run.
+CUT to the one-line summary if behind: "SPF/DKIM/DMARC stop domain spoofing, not lookalikes or
+a hacked account."</a:t>
+            </a:r>
+            <a:endParaRPr lang="en-US" dirty="0"/>
+          </a:p>
+        </p:txBody>
+      </p:sp>
+      <p:sp>
+        <p:nvSpPr>
+          <p:cNvPr id="4" name="Slide Number Placeholder 3"/>
+          <p:cNvSpPr>
+            <a:spLocks noGrp="1"/>
+          </p:cNvSpPr>
+          <p:nvPr>
+            <p:ph type="sldNum" sz="quarter" idx="10"/>
+          </p:nvPr>
+        </p:nvSpPr>
+        <p:spPr/>
+        <p:txBody>
+          <a:bodyPr/>
+          <a:lstStyle/>
+          <a:p>
+            <a:fld id="{F7021451-1387-4CA6-816F-3879F97B5CBC}" type="slidenum">
+              <a:rPr lang="en-US"/>
+              <a:t>7</a:t>
+            </a:fld>
+            <a:endParaRPr lang="en-US"/>
+          </a:p>
+        </p:txBody>
+      </p:sp>
+    </p:spTree>
+    <p:extLst>
+      <p:ext uri="{BB962C8B-B14F-4D97-AF65-F5344CB8AC3E}">
+        <p14:creationId xmlns:p14="http://schemas.microsoft.com/office/powerpoint/2010/main" val="1024086991"/>
+      </p:ext>
+    </p:extLst>
+  </p:cSld>
+  <p:clrMapOvr>
+    <a:masterClrMapping/>
+  </p:clrMapOvr>
+</p:notes>
+</file>
+
+<file path=ppt/notesSlides/notesSlide8.xml><?xml version="1.0" encoding="utf-8"?>
 <p:notes xmlns:a="http://schemas.openxmlformats.org/drawingml/2006/main" xmlns:r="http://schemas.openxmlformats.org/officeDocument/2006/relationships" xmlns:p="http://schemas.openxmlformats.org/presentationml/2006/main">
   <p:cSld>
     <p:spTree>
@@ -1809,7 +1991,7 @@
           <a:p>
             <a:fld id="{F7021451-1387-4CA6-816F-3879F97B5CBC}" type="slidenum">
               <a:rPr lang="en-US"/>
-              <a:t>7</a:t>
+              <a:t>8</a:t>
             </a:fld>
             <a:endParaRPr lang="en-US"/>
           </a:p>
@@ -1828,7 +2010,7 @@
 </p:notes>
 </file>
 
-<file path=ppt/notesSlides/notesSlide8.xml><?xml version="1.0" encoding="utf-8"?>
+<file path=ppt/notesSlides/notesSlide9.xml><?xml version="1.0" encoding="utf-8"?>
 <p:notes xmlns:a="http://schemas.openxmlformats.org/drawingml/2006/main" xmlns:r="http://schemas.openxmlformats.org/officeDocument/2006/relationships" xmlns:p="http://schemas.openxmlformats.org/presentationml/2006/main">
   <p:cSld>
     <p:spTree>
@@ -1876,96 +2058,6 @@
               <a:rPr lang="en-US" dirty="0"/>
               <a:t>Credential stuffing is why "but my password is strong" doesn't save you — if you reused it and
 the other site leaked, attackers just log in. MFA is the fix that actually scales.</a:t>
-            </a:r>
-            <a:endParaRPr lang="en-US" dirty="0"/>
-          </a:p>
-        </p:txBody>
-      </p:sp>
-      <p:sp>
-        <p:nvSpPr>
-          <p:cNvPr id="4" name="Slide Number Placeholder 3"/>
-          <p:cNvSpPr>
-            <a:spLocks noGrp="1"/>
-          </p:cNvSpPr>
-          <p:nvPr>
-            <p:ph type="sldNum" sz="quarter" idx="10"/>
-          </p:nvPr>
-        </p:nvSpPr>
-        <p:spPr/>
-        <p:txBody>
-          <a:bodyPr/>
-          <a:lstStyle/>
-          <a:p>
-            <a:fld id="{F7021451-1387-4CA6-816F-3879F97B5CBC}" type="slidenum">
-              <a:rPr lang="en-US"/>
-              <a:t>8</a:t>
-            </a:fld>
-            <a:endParaRPr lang="en-US"/>
-          </a:p>
-        </p:txBody>
-      </p:sp>
-    </p:spTree>
-    <p:extLst>
-      <p:ext uri="{BB962C8B-B14F-4D97-AF65-F5344CB8AC3E}">
-        <p14:creationId xmlns:p14="http://schemas.microsoft.com/office/powerpoint/2010/main" val="1024086991"/>
-      </p:ext>
-    </p:extLst>
-  </p:cSld>
-  <p:clrMapOvr>
-    <a:masterClrMapping/>
-  </p:clrMapOvr>
-</p:notes>
-</file>
-
-<file path=ppt/notesSlides/notesSlide9.xml><?xml version="1.0" encoding="utf-8"?>
-<p:notes xmlns:a="http://schemas.openxmlformats.org/drawingml/2006/main" xmlns:r="http://schemas.openxmlformats.org/officeDocument/2006/relationships" xmlns:p="http://schemas.openxmlformats.org/presentationml/2006/main">
-  <p:cSld>
-    <p:spTree>
-      <p:nvGrpSpPr>
-        <p:cNvPr id="1" name=""/>
-        <p:cNvGrpSpPr/>
-        <p:nvPr/>
-      </p:nvGrpSpPr>
-      <p:grpSpPr>
-        <a:xfrm>
-          <a:off x="0" y="0"/>
-          <a:ext cx="0" cy="0"/>
-          <a:chOff x="0" y="0"/>
-          <a:chExt cx="0" cy="0"/>
-        </a:xfrm>
-      </p:grpSpPr>
-      <p:sp>
-        <p:nvSpPr>
-          <p:cNvPr id="2" name="Slide Image Placeholder 1"/>
-          <p:cNvSpPr>
-            <a:spLocks noGrp="1" noRot="1" noChangeAspect="1"/>
-          </p:cNvSpPr>
-          <p:nvPr>
-            <p:ph type="sldImg"/>
-          </p:nvPr>
-        </p:nvSpPr>
-        <p:spPr/>
-      </p:sp>
-      <p:sp>
-        <p:nvSpPr>
-          <p:cNvPr id="3" name="Notes Placeholder 2"/>
-          <p:cNvSpPr>
-            <a:spLocks noGrp="1"/>
-          </p:cNvSpPr>
-          <p:nvPr>
-            <p:ph type="body" idx="1"/>
-          </p:nvPr>
-        </p:nvSpPr>
-        <p:spPr/>
-        <p:txBody>
-          <a:bodyPr/>
-          <a:lstStyle/>
-          <a:p>
-            <a:r>
-              <a:rPr lang="en-US" dirty="0"/>
-              <a:t>4 min. HIBP is Troy Hunt's breach-aggregation service — safe, reputable, no password entry.
-Most students will have 2-10 hits. Make the action concrete: the reused ones are the danger.
-CUT this DO first if short — but it lands hard, try to keep it.</a:t>
             </a:r>
             <a:endParaRPr lang="en-US" dirty="0"/>
           </a:p>
@@ -2629,6 +2721,45 @@
 <file path=ppt/slides/slide17.xml><?xml version="1.0" encoding="utf-8"?>
 <p:sld xmlns:a="http://schemas.openxmlformats.org/drawingml/2006/main" xmlns:r="http://schemas.openxmlformats.org/officeDocument/2006/relationships" xmlns:p="http://schemas.openxmlformats.org/presentationml/2006/main">
   <p:cSld name="Slide 17">
+    <p:bg>
+      <p:bgPr>
+        <a:blipFill dpi="0" rotWithShape="1">
+          <a:blip r:embed="rId1">
+            <a:lum/>
+          </a:blip>
+          <a:srcRect/>
+          <a:stretch>
+            <a:fillRect/>
+          </a:stretch>
+        </a:blipFill>
+        <a:effectLst/>
+      </p:bgPr>
+    </p:bg>
+    <p:spTree>
+      <p:nvGrpSpPr>
+        <p:cNvPr id="1" name=""/>
+        <p:cNvGrpSpPr/>
+        <p:nvPr/>
+      </p:nvGrpSpPr>
+      <p:grpSpPr>
+        <a:xfrm>
+          <a:off x="0" y="0"/>
+          <a:ext cx="0" cy="0"/>
+          <a:chOff x="0" y="0"/>
+          <a:chExt cx="0" cy="0"/>
+        </a:xfrm>
+      </p:grpSpPr>
+    </p:spTree>
+  </p:cSld>
+  <p:clrMapOvr>
+    <a:masterClrMapping/>
+  </p:clrMapOvr>
+</p:sld>
+</file>
+
+<file path=ppt/slides/slide18.xml><?xml version="1.0" encoding="utf-8"?>
+<p:sld xmlns:a="http://schemas.openxmlformats.org/drawingml/2006/main" xmlns:r="http://schemas.openxmlformats.org/officeDocument/2006/relationships" xmlns:p="http://schemas.openxmlformats.org/presentationml/2006/main">
+  <p:cSld name="Slide 18">
     <p:bg>
       <p:bgPr>
         <a:blipFill dpi="0" rotWithShape="1">
